--- a/assets/powerpoints/module-n1-orientation/A1-le-dessin-et-le-mot.pptx
+++ b/assets/powerpoints/module-n1-orientation/A1-le-dessin-et-le-mot.pptx
@@ -9269,7 +9269,43 @@
                 </a:solidFill>
                 <a:latin typeface="Verdana"/>
               </a:rPr>
-              <a:t>Le &lt;b&gt;dessin&lt;/b&gt; se comprend tout de suite, dans toutes les langues. Le &lt;b&gt;mot&lt;/b&gt; écrit à côté dit exactement la même chose, en français. Quand on ne lit pas encore, on regarde le dessin — et on apprend le mot en même temps, gratuitement.</a:t>
+              <a:t>Le </a:t>
+            </a:r>
+            <a:r>
+              <a:rPr sz="2000" b="1" i="0">
+                <a:solidFill>
+                  <a:srgbClr val="4B4F52"/>
+                </a:solidFill>
+                <a:latin typeface="Verdana"/>
+              </a:rPr>
+              <a:t>dessin</a:t>
+            </a:r>
+            <a:r>
+              <a:rPr sz="2000" b="0" i="0">
+                <a:solidFill>
+                  <a:srgbClr val="4B4F52"/>
+                </a:solidFill>
+                <a:latin typeface="Verdana"/>
+              </a:rPr>
+              <a:t> se comprend tout de suite, dans toutes les langues. Le </a:t>
+            </a:r>
+            <a:r>
+              <a:rPr sz="2000" b="1" i="0">
+                <a:solidFill>
+                  <a:srgbClr val="4B4F52"/>
+                </a:solidFill>
+                <a:latin typeface="Verdana"/>
+              </a:rPr>
+              <a:t>mot</a:t>
+            </a:r>
+            <a:r>
+              <a:rPr sz="2000" b="0" i="0">
+                <a:solidFill>
+                  <a:srgbClr val="4B4F52"/>
+                </a:solidFill>
+                <a:latin typeface="Verdana"/>
+              </a:rPr>
+              <a:t> écrit à côté dit exactement la même chose, en français. Quand on ne lit pas encore, on regarde le dessin — et on apprend le mot en même temps, gratuitement.</a:t>
             </a:r>
           </a:p>
         </p:txBody>
